--- a/モバイル制作.pptx
+++ b/モバイル制作.pptx
@@ -4319,7 +4319,62 @@
           <a:bodyPr/>
           <a:lstStyle/>
           <a:p>
-            <a:endParaRPr kumimoji="1" lang="ja-JP" altLang="en-US"/>
+            <a:r>
+              <a:rPr kumimoji="1" lang="ja-JP" altLang="en-US" dirty="0"/>
+              <a:t>昨日の追加</a:t>
+            </a:r>
+            <a:endParaRPr kumimoji="1" lang="en-US" altLang="ja-JP" dirty="0"/>
+          </a:p>
+          <a:p>
+            <a:pPr marL="0" indent="0">
+              <a:buNone/>
+            </a:pPr>
+            <a:r>
+              <a:rPr lang="ja-JP" altLang="en-US" dirty="0"/>
+              <a:t>一覧表示、月・年ごとの合計表示</a:t>
+            </a:r>
+            <a:endParaRPr lang="en-US" altLang="ja-JP" dirty="0"/>
+          </a:p>
+          <a:p>
+            <a:pPr marL="0" indent="0">
+              <a:buNone/>
+            </a:pPr>
+            <a:endParaRPr lang="en-US" altLang="ja-JP" dirty="0"/>
+          </a:p>
+          <a:p>
+            <a:r>
+              <a:rPr lang="ja-JP" altLang="en-US" dirty="0"/>
+              <a:t>カテゴリー分類表示</a:t>
+            </a:r>
+            <a:endParaRPr lang="en-US" altLang="ja-JP" dirty="0"/>
+          </a:p>
+          <a:p>
+            <a:pPr marL="0" indent="0">
+              <a:buNone/>
+            </a:pPr>
+            <a:r>
+              <a:rPr lang="ja-JP" altLang="en-US" dirty="0"/>
+              <a:t>出費、収入をカテゴリごとに表示する。</a:t>
+            </a:r>
+            <a:endParaRPr lang="en-US" altLang="ja-JP" dirty="0"/>
+          </a:p>
+          <a:p>
+            <a:endParaRPr lang="en-US" altLang="ja-JP" dirty="0"/>
+          </a:p>
+          <a:p>
+            <a:endParaRPr lang="en-US" altLang="ja-JP" dirty="0"/>
+          </a:p>
+          <a:p>
+            <a:endParaRPr lang="en-US" altLang="ja-JP" dirty="0"/>
+          </a:p>
+          <a:p>
+            <a:endParaRPr lang="en-US" altLang="ja-JP" dirty="0"/>
+          </a:p>
+          <a:p>
+            <a:pPr marL="0" indent="0">
+              <a:buNone/>
+            </a:pPr>
+            <a:endParaRPr lang="en-US" altLang="ja-JP" dirty="0"/>
           </a:p>
         </p:txBody>
       </p:sp>

--- a/モバイル制作.pptx
+++ b/モバイル制作.pptx
@@ -263,7 +263,7 @@
           <a:p>
             <a:fld id="{04865C93-574B-433C-A516-BC42ACC1B916}" type="datetime1">
               <a:rPr lang="en-US" smtClean="0"/>
-              <a:t>1/21/2026</a:t>
+              <a:t>6/29/2026</a:t>
             </a:fld>
             <a:endParaRPr lang="en-US"/>
           </a:p>
@@ -493,7 +493,7 @@
           <a:p>
             <a:fld id="{71142B58-A1C3-4100-9789-002FC8361227}" type="datetime1">
               <a:rPr lang="en-US" smtClean="0"/>
-              <a:t>1/21/2026</a:t>
+              <a:t>6/29/2026</a:t>
             </a:fld>
             <a:endParaRPr lang="en-US"/>
           </a:p>
@@ -733,7 +733,7 @@
           <a:p>
             <a:fld id="{D4E3B5BA-24BB-4C9C-B828-356D32957235}" type="datetime1">
               <a:rPr lang="en-US" smtClean="0"/>
-              <a:t>1/21/2026</a:t>
+              <a:t>6/29/2026</a:t>
             </a:fld>
             <a:endParaRPr lang="en-US"/>
           </a:p>
@@ -963,7 +963,7 @@
           <a:p>
             <a:fld id="{6525B016-0220-49FE-98B1-1841879001D1}" type="datetime1">
               <a:rPr lang="en-US" smtClean="0"/>
-              <a:t>1/21/2026</a:t>
+              <a:t>6/29/2026</a:t>
             </a:fld>
             <a:endParaRPr lang="en-US"/>
           </a:p>
@@ -1238,7 +1238,7 @@
           <a:p>
             <a:fld id="{34903557-DFF5-43BB-9FEA-74C1368A7B32}" type="datetime1">
               <a:rPr lang="en-US" smtClean="0"/>
-              <a:t>1/21/2026</a:t>
+              <a:t>6/29/2026</a:t>
             </a:fld>
             <a:endParaRPr lang="en-US"/>
           </a:p>
@@ -1567,7 +1567,7 @@
           <a:p>
             <a:fld id="{7788E048-FD66-4D7A-B6D9-3C42242047E6}" type="datetime1">
               <a:rPr lang="en-US" smtClean="0"/>
-              <a:t>1/21/2026</a:t>
+              <a:t>6/29/2026</a:t>
             </a:fld>
             <a:endParaRPr lang="en-US"/>
           </a:p>
@@ -2043,7 +2043,7 @@
           <a:p>
             <a:fld id="{1E38DF04-88F7-4944-8376-13061EF07AF1}" type="datetime1">
               <a:rPr lang="en-US" smtClean="0"/>
-              <a:t>1/21/2026</a:t>
+              <a:t>6/29/2026</a:t>
             </a:fld>
             <a:endParaRPr lang="en-US"/>
           </a:p>
@@ -2184,7 +2184,7 @@
           <a:p>
             <a:fld id="{4C760584-84A2-4571-86E8-F10C0B271A5D}" type="datetime1">
               <a:rPr lang="en-US" smtClean="0"/>
-              <a:t>1/21/2026</a:t>
+              <a:t>6/29/2026</a:t>
             </a:fld>
             <a:endParaRPr lang="en-US"/>
           </a:p>
@@ -2297,7 +2297,7 @@
           <a:p>
             <a:fld id="{5D9E3C66-5192-45E4-A993-7C5922B6762B}" type="datetime1">
               <a:rPr lang="en-US" smtClean="0"/>
-              <a:t>1/21/2026</a:t>
+              <a:t>6/29/2026</a:t>
             </a:fld>
             <a:endParaRPr lang="en-US"/>
           </a:p>
@@ -2640,7 +2640,7 @@
           <a:p>
             <a:fld id="{42AB698A-51D5-4114-8C08-468B337C164C}" type="datetime1">
               <a:rPr lang="en-US" smtClean="0"/>
-              <a:t>1/21/2026</a:t>
+              <a:t>6/29/2026</a:t>
             </a:fld>
             <a:endParaRPr lang="en-US"/>
           </a:p>
@@ -2928,7 +2928,7 @@
           <a:p>
             <a:fld id="{EC0F8E19-BCA4-496E-9A50-9B808BE903A1}" type="datetime1">
               <a:rPr lang="en-US" smtClean="0"/>
-              <a:t>1/21/2026</a:t>
+              <a:t>6/29/2026</a:t>
             </a:fld>
             <a:endParaRPr lang="en-US"/>
           </a:p>
@@ -3201,7 +3201,7 @@
           <a:p>
             <a:fld id="{1A469DBF-9520-400C-A70B-D0357F911F10}" type="datetime1">
               <a:rPr lang="en-US" smtClean="0"/>
-              <a:t>1/21/2026</a:t>
+              <a:t>6/29/2026</a:t>
             </a:fld>
             <a:endParaRPr lang="en-US" dirty="0"/>
           </a:p>
@@ -4320,8 +4320,12 @@
           <a:lstStyle/>
           <a:p>
             <a:r>
+              <a:rPr lang="ja-JP" altLang="en-US" dirty="0"/>
+              <a:t>機能</a:t>
+            </a:r>
+            <a:r>
               <a:rPr kumimoji="1" lang="ja-JP" altLang="en-US" dirty="0"/>
-              <a:t>昨日の追加</a:t>
+              <a:t>の追加</a:t>
             </a:r>
             <a:endParaRPr kumimoji="1" lang="en-US" altLang="ja-JP" dirty="0"/>
           </a:p>
